--- a/CST-3502_Data_Understanding_Pres.pptx
+++ b/CST-3502_Data_Understanding_Pres.pptx
@@ -18891,7 +18891,7 @@
                 <a:srgbClr val="D9D4E3"/>
               </a:buClr>
               <a:buSzPts val="1300"/>
-              <a:buAutoNum type="arabicPeriod"/>
+              <a:buAutoNum type="arabicPeriod" startAt="2"/>
             </a:pPr>
             <a:r>
               <a:rPr lang="en-US" sz="1300" b="1">
